--- a/test-corpus/word-verification/pie.pptx
+++ b/test-corpus/word-verification/pie.pptx
@@ -144,8 +144,8 @@
         </p:nvSpPr>
         <p:spPr>
           <a:xfrm>
-            <a:off x="2300425" y="1028700"/>
-            <a:ext cx="7591150" cy="784539"/>
+            <a:off x="457200" y="1225564"/>
+            <a:ext cx="7034784" cy="727039"/>
           </a:xfrm>
           <a:prstGeom prst="rect">
             <a:avLst/>
@@ -168,7 +168,7 @@
               </a:spcAft>
             </a:pPr>
             <a:r>
-              <a:rPr lang="en-US" b="1" sz="1954" dirty="0">
+              <a:rPr lang="en-US" b="1" sz="1811" dirty="0">
                 <a:solidFill>
                   <a:srgbClr val="000000"/>
                 </a:solidFill>
@@ -186,8 +186,8 @@
         </p:nvSpPr>
         <p:spPr>
           <a:xfrm>
-            <a:off x="2699344" y="2012699"/>
-            <a:ext cx="3989183" cy="3989183"/>
+            <a:off x="826881" y="2137444"/>
+            <a:ext cx="3696811" cy="3696811"/>
           </a:xfrm>
           <a:prstGeom prst="pie">
             <a:avLst>
@@ -198,7 +198,7 @@
           <a:solidFill>
             <a:srgbClr val="4472C4"/>
           </a:solidFill>
-          <a:ln w="26595">
+          <a:ln w="24645">
             <a:solidFill>
               <a:srgbClr val="FFFFFF"/>
             </a:solidFill>
@@ -213,8 +213,8 @@
         </p:nvSpPr>
         <p:spPr>
           <a:xfrm>
-            <a:off x="2699344" y="2012699"/>
-            <a:ext cx="3989183" cy="3989183"/>
+            <a:off x="826881" y="2137444"/>
+            <a:ext cx="3696811" cy="3696811"/>
           </a:xfrm>
           <a:prstGeom prst="pie">
             <a:avLst>
@@ -225,7 +225,7 @@
           <a:solidFill>
             <a:srgbClr val="ED7D31"/>
           </a:solidFill>
-          <a:ln w="26595">
+          <a:ln w="24645">
             <a:solidFill>
               <a:srgbClr val="FFFFFF"/>
             </a:solidFill>
@@ -240,8 +240,8 @@
         </p:nvSpPr>
         <p:spPr>
           <a:xfrm>
-            <a:off x="2699344" y="2012699"/>
-            <a:ext cx="3989183" cy="3989183"/>
+            <a:off x="826881" y="2137444"/>
+            <a:ext cx="3696811" cy="3696811"/>
           </a:xfrm>
           <a:prstGeom prst="pie">
             <a:avLst>
@@ -252,7 +252,7 @@
           <a:solidFill>
             <a:srgbClr val="A5A5A5"/>
           </a:solidFill>
-          <a:ln w="26595">
+          <a:ln w="24645">
             <a:solidFill>
               <a:srgbClr val="FFFFFF"/>
             </a:solidFill>
@@ -267,8 +267,8 @@
         </p:nvSpPr>
         <p:spPr>
           <a:xfrm>
-            <a:off x="2699344" y="2012699"/>
-            <a:ext cx="3989183" cy="3989183"/>
+            <a:off x="826881" y="2137444"/>
+            <a:ext cx="3696811" cy="3696811"/>
           </a:xfrm>
           <a:prstGeom prst="pie">
             <a:avLst>
@@ -279,7 +279,7 @@
           <a:solidFill>
             <a:srgbClr val="FFC000"/>
           </a:solidFill>
-          <a:ln w="26595">
+          <a:ln w="24645">
             <a:solidFill>
               <a:srgbClr val="FFFFFF"/>
             </a:solidFill>
@@ -294,8 +294,8 @@
         </p:nvSpPr>
         <p:spPr>
           <a:xfrm>
-            <a:off x="5780859" y="3415093"/>
-            <a:ext cx="664864" cy="239351"/>
+            <a:off x="3682548" y="3437055"/>
+            <a:ext cx="616135" cy="221809"/>
           </a:xfrm>
           <a:prstGeom prst="rect">
             <a:avLst/>
@@ -318,7 +318,7 @@
               </a:spcAft>
             </a:pPr>
             <a:r>
-              <a:rPr lang="en-US" sz="1187" dirty="0">
+              <a:rPr lang="en-US" sz="1100" dirty="0">
                 <a:solidFill>
                   <a:srgbClr val="000000"/>
                 </a:solidFill>
@@ -336,8 +336,8 @@
         </p:nvSpPr>
         <p:spPr>
           <a:xfrm>
-            <a:off x="3275042" y="4915939"/>
-            <a:ext cx="664864" cy="239351"/>
+            <a:off x="1360386" y="4827902"/>
+            <a:ext cx="616135" cy="221809"/>
           </a:xfrm>
           <a:prstGeom prst="rect">
             <a:avLst/>
@@ -360,7 +360,7 @@
               </a:spcAft>
             </a:pPr>
             <a:r>
-              <a:rPr lang="en-US" sz="1187" dirty="0">
+              <a:rPr lang="en-US" sz="1100" dirty="0">
                 <a:solidFill>
                   <a:srgbClr val="000000"/>
                 </a:solidFill>
@@ -378,8 +378,8 @@
         </p:nvSpPr>
         <p:spPr>
           <a:xfrm>
-            <a:off x="3539240" y="2637922"/>
-            <a:ext cx="664864" cy="239351"/>
+            <a:off x="1605220" y="2716844"/>
+            <a:ext cx="616135" cy="221809"/>
           </a:xfrm>
           <a:prstGeom prst="rect">
             <a:avLst/>
@@ -402,7 +402,7 @@
               </a:spcAft>
             </a:pPr>
             <a:r>
-              <a:rPr lang="en-US" sz="1187" dirty="0">
+              <a:rPr lang="en-US" sz="1100" dirty="0">
                 <a:solidFill>
                   <a:srgbClr val="000000"/>
                 </a:solidFill>
@@ -420,8 +420,8 @@
         </p:nvSpPr>
         <p:spPr>
           <a:xfrm>
-            <a:off x="4144733" y="2407459"/>
-            <a:ext cx="664864" cy="239351"/>
+            <a:off x="2166336" y="2503273"/>
+            <a:ext cx="616135" cy="221809"/>
           </a:xfrm>
           <a:prstGeom prst="rect">
             <a:avLst/>
@@ -444,7 +444,7 @@
               </a:spcAft>
             </a:pPr>
             <a:r>
-              <a:rPr lang="en-US" sz="1187" dirty="0">
+              <a:rPr lang="en-US" sz="1100" dirty="0">
                 <a:solidFill>
                   <a:srgbClr val="000000"/>
                 </a:solidFill>
@@ -462,8 +462,8 @@
         </p:nvSpPr>
         <p:spPr>
           <a:xfrm>
-            <a:off x="7220418" y="3382318"/>
-            <a:ext cx="212756" cy="212756"/>
+            <a:off x="5016600" y="3406682"/>
+            <a:ext cx="197163" cy="197163"/>
           </a:xfrm>
           <a:prstGeom prst="rect">
             <a:avLst/>
@@ -484,8 +484,8 @@
         </p:nvSpPr>
         <p:spPr>
           <a:xfrm>
-            <a:off x="7539552" y="3315832"/>
-            <a:ext cx="1953104" cy="345729"/>
+            <a:off x="5312345" y="3345069"/>
+            <a:ext cx="1809958" cy="320390"/>
           </a:xfrm>
           <a:prstGeom prst="rect">
             <a:avLst/>
@@ -508,7 +508,7 @@
               </a:spcAft>
             </a:pPr>
             <a:r>
-              <a:rPr lang="en-US" sz="1396" dirty="0">
+              <a:rPr lang="en-US" sz="1294" dirty="0">
                 <a:solidFill>
                   <a:srgbClr val="000000"/>
                 </a:solidFill>
@@ -526,8 +526,8 @@
         </p:nvSpPr>
         <p:spPr>
           <a:xfrm>
-            <a:off x="7220418" y="3728047"/>
-            <a:ext cx="212756" cy="212756"/>
+            <a:off x="5016600" y="3727073"/>
+            <a:ext cx="197163" cy="197163"/>
           </a:xfrm>
           <a:prstGeom prst="rect">
             <a:avLst/>
@@ -548,8 +548,8 @@
         </p:nvSpPr>
         <p:spPr>
           <a:xfrm>
-            <a:off x="7539552" y="3661561"/>
-            <a:ext cx="1953104" cy="345729"/>
+            <a:off x="5312345" y="3665459"/>
+            <a:ext cx="1809958" cy="320390"/>
           </a:xfrm>
           <a:prstGeom prst="rect">
             <a:avLst/>
@@ -572,7 +572,7 @@
               </a:spcAft>
             </a:pPr>
             <a:r>
-              <a:rPr lang="en-US" sz="1396" dirty="0">
+              <a:rPr lang="en-US" sz="1294" dirty="0">
                 <a:solidFill>
                   <a:srgbClr val="000000"/>
                 </a:solidFill>
@@ -590,8 +590,8 @@
         </p:nvSpPr>
         <p:spPr>
           <a:xfrm>
-            <a:off x="7220418" y="4073776"/>
-            <a:ext cx="212756" cy="212756"/>
+            <a:off x="5016600" y="4047463"/>
+            <a:ext cx="197163" cy="197163"/>
           </a:xfrm>
           <a:prstGeom prst="rect">
             <a:avLst/>
@@ -612,8 +612,8 @@
         </p:nvSpPr>
         <p:spPr>
           <a:xfrm>
-            <a:off x="7539552" y="4007290"/>
-            <a:ext cx="1953104" cy="345729"/>
+            <a:off x="5312345" y="3985849"/>
+            <a:ext cx="1809958" cy="320390"/>
           </a:xfrm>
           <a:prstGeom prst="rect">
             <a:avLst/>
@@ -636,7 +636,7 @@
               </a:spcAft>
             </a:pPr>
             <a:r>
-              <a:rPr lang="en-US" sz="1396" dirty="0">
+              <a:rPr lang="en-US" sz="1294" dirty="0">
                 <a:solidFill>
                   <a:srgbClr val="000000"/>
                 </a:solidFill>
@@ -654,8 +654,8 @@
         </p:nvSpPr>
         <p:spPr>
           <a:xfrm>
-            <a:off x="7220418" y="4419506"/>
-            <a:ext cx="212756" cy="212756"/>
+            <a:off x="5016600" y="4367853"/>
+            <a:ext cx="197163" cy="197163"/>
           </a:xfrm>
           <a:prstGeom prst="rect">
             <a:avLst/>
@@ -676,8 +676,8 @@
         </p:nvSpPr>
         <p:spPr>
           <a:xfrm>
-            <a:off x="7539552" y="4353019"/>
-            <a:ext cx="1953104" cy="345729"/>
+            <a:off x="5312345" y="4306240"/>
+            <a:ext cx="1809958" cy="320390"/>
           </a:xfrm>
           <a:prstGeom prst="rect">
             <a:avLst/>
@@ -700,12 +700,120 @@
               </a:spcAft>
             </a:pPr>
             <a:r>
-              <a:rPr lang="en-US" sz="1396" dirty="0">
+              <a:rPr lang="en-US" sz="1294" dirty="0">
                 <a:solidFill>
                   <a:srgbClr val="000000"/>
                 </a:solidFill>
               </a:rPr>
               <a:t>Iron [5]</a:t>
+            </a:r>
+          </a:p>
+        </p:txBody>
+      </p:sp>
+      <p:sp>
+        <p:nvSpPr>
+          <p:cNvPr id="4" name="Mermaid source"/>
+          <p:cNvSpPr/>
+          <p:nvPr/>
+        </p:nvSpPr>
+        <p:spPr>
+          <a:xfrm>
+            <a:off x="7674864" y="1028700"/>
+            <a:ext cx="4059936" cy="5372100"/>
+          </a:xfrm>
+          <a:prstGeom prst="rect">
+            <a:avLst/>
+          </a:prstGeom>
+          <a:solidFill>
+            <a:srgbClr val="F3F4F6"/>
+          </a:solidFill>
+          <a:ln w="9525">
+            <a:solidFill>
+              <a:srgbClr val="D1D5DB"/>
+            </a:solidFill>
+          </a:ln>
+        </p:spPr>
+        <p:txBody>
+          <a:bodyPr wrap="square" lIns="91440" tIns="45720" rIns="91440" bIns="45720" anchor="t">
+            <a:noAutofit/>
+          </a:bodyPr>
+          <a:lstStyle/>
+          <a:p>
+            <a:pPr algn="l"/>
+            <a:r>
+              <a:rPr lang="en-US" sz="1400" dirty="0">
+                <a:solidFill>
+                  <a:srgbClr val="1F2937"/>
+                </a:solidFill>
+                <a:latin typeface="Consolas"/>
+                <a:cs typeface="Consolas"/>
+              </a:rPr>
+              <a:t>pie showData</a:t>
+            </a:r>
+          </a:p>
+          <a:p>
+            <a:pPr algn="l"/>
+            <a:r>
+              <a:rPr lang="en-US" sz="1400" dirty="0">
+                <a:solidFill>
+                  <a:srgbClr val="1F2937"/>
+                </a:solidFill>
+                <a:latin typeface="Consolas"/>
+                <a:cs typeface="Consolas"/>
+              </a:rPr>
+              <a:t>    title Key elements in Product X</a:t>
+            </a:r>
+          </a:p>
+          <a:p>
+            <a:pPr algn="l"/>
+            <a:r>
+              <a:rPr lang="en-US" sz="1400" dirty="0">
+                <a:solidFill>
+                  <a:srgbClr val="1F2937"/>
+                </a:solidFill>
+                <a:latin typeface="Consolas"/>
+                <a:cs typeface="Consolas"/>
+              </a:rPr>
+              <a:t>    "Calcium" : 42.96</a:t>
+            </a:r>
+          </a:p>
+          <a:p>
+            <a:pPr algn="l"/>
+            <a:r>
+              <a:rPr lang="en-US" sz="1400" dirty="0">
+                <a:solidFill>
+                  <a:srgbClr val="1F2937"/>
+                </a:solidFill>
+                <a:latin typeface="Consolas"/>
+                <a:cs typeface="Consolas"/>
+              </a:rPr>
+              <a:t>    "Potassium" : 50.05</a:t>
+            </a:r>
+          </a:p>
+          <a:p>
+            <a:pPr algn="l"/>
+            <a:r>
+              <a:rPr lang="en-US" sz="1400" dirty="0">
+                <a:solidFill>
+                  <a:srgbClr val="1F2937"/>
+                </a:solidFill>
+                <a:latin typeface="Consolas"/>
+                <a:cs typeface="Consolas"/>
+              </a:rPr>
+              <a:t>    "Magnesium" : 10.01</a:t>
+            </a:r>
+          </a:p>
+          <a:p>
+            <a:pPr algn="l"/>
+            <a:r>
+              <a:rPr lang="en-US" sz="1400" dirty="0">
+                <a:solidFill>
+                  <a:srgbClr val="1F2937"/>
+                </a:solidFill>
+                <a:latin typeface="Consolas"/>
+                <a:cs typeface="Consolas"/>
+              </a:rPr>
+              <a:t>    "Iron" :  5</a:t>
             </a:r>
           </a:p>
         </p:txBody>
